--- a/docs/pptx/whole/jx-scatter-cg-epi-bmi30.pptx
+++ b/docs/pptx/whole/jx-scatter-cg-epi-bmi30.pptx
@@ -36084,7 +36084,2052 @@
         </p:sp>
         <p:sp>
           <p:nvSpPr>
-            <p:cNvPr id="966" name="tx966"/>
+            <p:cNvPr id="966" name="pg966"/>
+            <p:cNvSpPr/>
+            <p:nvPr/>
+          </p:nvSpPr>
+          <p:spPr>
+            <a:xfrm>
+              <a:off x="1985667" y="2659304"/>
+              <a:ext cx="6033829" cy="2208099"/>
+            </a:xfrm>
+            <a:custGeom>
+              <a:avLst/>
+              <a:pathLst>
+                <a:path w="6033829" h="2208099">
+                  <a:moveTo>
+                    <a:pt x="0" y="2124553"/>
+                  </a:moveTo>
+                  <a:lnTo>
+                    <a:pt x="76377" y="2099264"/>
+                  </a:lnTo>
+                  <a:lnTo>
+                    <a:pt x="152755" y="2073967"/>
+                  </a:lnTo>
+                  <a:lnTo>
+                    <a:pt x="229132" y="2048660"/>
+                  </a:lnTo>
+                  <a:lnTo>
+                    <a:pt x="305510" y="2023343"/>
+                  </a:lnTo>
+                  <a:lnTo>
+                    <a:pt x="381887" y="1998014"/>
+                  </a:lnTo>
+                  <a:lnTo>
+                    <a:pt x="458265" y="1972673"/>
+                  </a:lnTo>
+                  <a:lnTo>
+                    <a:pt x="534643" y="1947318"/>
+                  </a:lnTo>
+                  <a:lnTo>
+                    <a:pt x="611020" y="1921948"/>
+                  </a:lnTo>
+                  <a:lnTo>
+                    <a:pt x="687398" y="1896560"/>
+                  </a:lnTo>
+                  <a:lnTo>
+                    <a:pt x="763775" y="1871154"/>
+                  </a:lnTo>
+                  <a:lnTo>
+                    <a:pt x="840153" y="1845726"/>
+                  </a:lnTo>
+                  <a:lnTo>
+                    <a:pt x="916531" y="1820275"/>
+                  </a:lnTo>
+                  <a:lnTo>
+                    <a:pt x="992908" y="1794797"/>
+                  </a:lnTo>
+                  <a:lnTo>
+                    <a:pt x="1069286" y="1769290"/>
+                  </a:lnTo>
+                  <a:lnTo>
+                    <a:pt x="1145663" y="1743749"/>
+                  </a:lnTo>
+                  <a:lnTo>
+                    <a:pt x="1222041" y="1718171"/>
+                  </a:lnTo>
+                  <a:lnTo>
+                    <a:pt x="1298419" y="1692551"/>
+                  </a:lnTo>
+                  <a:lnTo>
+                    <a:pt x="1374796" y="1666884"/>
+                  </a:lnTo>
+                  <a:lnTo>
+                    <a:pt x="1451174" y="1641164"/>
+                  </a:lnTo>
+                  <a:lnTo>
+                    <a:pt x="1527551" y="1615386"/>
+                  </a:lnTo>
+                  <a:lnTo>
+                    <a:pt x="1603929" y="1589542"/>
+                  </a:lnTo>
+                  <a:lnTo>
+                    <a:pt x="1680307" y="1563626"/>
+                  </a:lnTo>
+                  <a:lnTo>
+                    <a:pt x="1756684" y="1537632"/>
+                  </a:lnTo>
+                  <a:lnTo>
+                    <a:pt x="1833062" y="1511552"/>
+                  </a:lnTo>
+                  <a:lnTo>
+                    <a:pt x="1909439" y="1485380"/>
+                  </a:lnTo>
+                  <a:lnTo>
+                    <a:pt x="1985817" y="1459110"/>
+                  </a:lnTo>
+                  <a:lnTo>
+                    <a:pt x="2062195" y="1432740"/>
+                  </a:lnTo>
+                  <a:lnTo>
+                    <a:pt x="2138572" y="1406266"/>
+                  </a:lnTo>
+                  <a:lnTo>
+                    <a:pt x="2214950" y="1379687"/>
+                  </a:lnTo>
+                  <a:lnTo>
+                    <a:pt x="2291327" y="1353005"/>
+                  </a:lnTo>
+                  <a:lnTo>
+                    <a:pt x="2367705" y="1326223"/>
+                  </a:lnTo>
+                  <a:lnTo>
+                    <a:pt x="2444083" y="1299344"/>
+                  </a:lnTo>
+                  <a:lnTo>
+                    <a:pt x="2520460" y="1272375"/>
+                  </a:lnTo>
+                  <a:lnTo>
+                    <a:pt x="2596838" y="1245321"/>
+                  </a:lnTo>
+                  <a:lnTo>
+                    <a:pt x="2673215" y="1218190"/>
+                  </a:lnTo>
+                  <a:lnTo>
+                    <a:pt x="2749593" y="1190989"/>
+                  </a:lnTo>
+                  <a:lnTo>
+                    <a:pt x="2825971" y="1163723"/>
+                  </a:lnTo>
+                  <a:lnTo>
+                    <a:pt x="2902348" y="1136400"/>
+                  </a:lnTo>
+                  <a:lnTo>
+                    <a:pt x="2978726" y="1109025"/>
+                  </a:lnTo>
+                  <a:lnTo>
+                    <a:pt x="3055103" y="1081605"/>
+                  </a:lnTo>
+                  <a:lnTo>
+                    <a:pt x="3131481" y="1054144"/>
+                  </a:lnTo>
+                  <a:lnTo>
+                    <a:pt x="3207858" y="1026646"/>
+                  </a:lnTo>
+                  <a:lnTo>
+                    <a:pt x="3284236" y="999115"/>
+                  </a:lnTo>
+                  <a:lnTo>
+                    <a:pt x="3360614" y="971556"/>
+                  </a:lnTo>
+                  <a:lnTo>
+                    <a:pt x="3436991" y="943970"/>
+                  </a:lnTo>
+                  <a:lnTo>
+                    <a:pt x="3513369" y="916362"/>
+                  </a:lnTo>
+                  <a:lnTo>
+                    <a:pt x="3589746" y="888733"/>
+                  </a:lnTo>
+                  <a:lnTo>
+                    <a:pt x="3666124" y="861085"/>
+                  </a:lnTo>
+                  <a:lnTo>
+                    <a:pt x="3742502" y="833421"/>
+                  </a:lnTo>
+                  <a:lnTo>
+                    <a:pt x="3818879" y="805741"/>
+                  </a:lnTo>
+                  <a:lnTo>
+                    <a:pt x="3895257" y="778048"/>
+                  </a:lnTo>
+                  <a:lnTo>
+                    <a:pt x="3971634" y="750343"/>
+                  </a:lnTo>
+                  <a:lnTo>
+                    <a:pt x="4048012" y="722626"/>
+                  </a:lnTo>
+                  <a:lnTo>
+                    <a:pt x="4124390" y="694899"/>
+                  </a:lnTo>
+                  <a:lnTo>
+                    <a:pt x="4200767" y="667163"/>
+                  </a:lnTo>
+                  <a:lnTo>
+                    <a:pt x="4277145" y="639419"/>
+                  </a:lnTo>
+                  <a:lnTo>
+                    <a:pt x="4353522" y="611667"/>
+                  </a:lnTo>
+                  <a:lnTo>
+                    <a:pt x="4429900" y="583908"/>
+                  </a:lnTo>
+                  <a:lnTo>
+                    <a:pt x="4506278" y="556142"/>
+                  </a:lnTo>
+                  <a:lnTo>
+                    <a:pt x="4582655" y="528370"/>
+                  </a:lnTo>
+                  <a:lnTo>
+                    <a:pt x="4659033" y="500593"/>
+                  </a:lnTo>
+                  <a:lnTo>
+                    <a:pt x="4735410" y="472811"/>
+                  </a:lnTo>
+                  <a:lnTo>
+                    <a:pt x="4811788" y="445024"/>
+                  </a:lnTo>
+                  <a:lnTo>
+                    <a:pt x="4888166" y="417233"/>
+                  </a:lnTo>
+                  <a:lnTo>
+                    <a:pt x="4964543" y="389437"/>
+                  </a:lnTo>
+                  <a:lnTo>
+                    <a:pt x="5040921" y="361638"/>
+                  </a:lnTo>
+                  <a:lnTo>
+                    <a:pt x="5117298" y="333836"/>
+                  </a:lnTo>
+                  <a:lnTo>
+                    <a:pt x="5193676" y="306030"/>
+                  </a:lnTo>
+                  <a:lnTo>
+                    <a:pt x="5270054" y="278221"/>
+                  </a:lnTo>
+                  <a:lnTo>
+                    <a:pt x="5346431" y="250409"/>
+                  </a:lnTo>
+                  <a:lnTo>
+                    <a:pt x="5422809" y="222594"/>
+                  </a:lnTo>
+                  <a:lnTo>
+                    <a:pt x="5499186" y="194777"/>
+                  </a:lnTo>
+                  <a:lnTo>
+                    <a:pt x="5575564" y="166958"/>
+                  </a:lnTo>
+                  <a:lnTo>
+                    <a:pt x="5651942" y="139136"/>
+                  </a:lnTo>
+                  <a:lnTo>
+                    <a:pt x="5728319" y="111313"/>
+                  </a:lnTo>
+                  <a:lnTo>
+                    <a:pt x="5804697" y="83487"/>
+                  </a:lnTo>
+                  <a:lnTo>
+                    <a:pt x="5881074" y="55660"/>
+                  </a:lnTo>
+                  <a:lnTo>
+                    <a:pt x="5957452" y="27830"/>
+                  </a:lnTo>
+                  <a:lnTo>
+                    <a:pt x="6033829" y="0"/>
+                  </a:lnTo>
+                  <a:lnTo>
+                    <a:pt x="6033829" y="143157"/>
+                  </a:lnTo>
+                  <a:lnTo>
+                    <a:pt x="5957452" y="168358"/>
+                  </a:lnTo>
+                  <a:lnTo>
+                    <a:pt x="5881074" y="193560"/>
+                  </a:lnTo>
+                  <a:lnTo>
+                    <a:pt x="5804697" y="218764"/>
+                  </a:lnTo>
+                  <a:lnTo>
+                    <a:pt x="5728319" y="243970"/>
+                  </a:lnTo>
+                  <a:lnTo>
+                    <a:pt x="5651942" y="269178"/>
+                  </a:lnTo>
+                  <a:lnTo>
+                    <a:pt x="5575564" y="294388"/>
+                  </a:lnTo>
+                  <a:lnTo>
+                    <a:pt x="5499186" y="319600"/>
+                  </a:lnTo>
+                  <a:lnTo>
+                    <a:pt x="5422809" y="344815"/>
+                  </a:lnTo>
+                  <a:lnTo>
+                    <a:pt x="5346431" y="370032"/>
+                  </a:lnTo>
+                  <a:lnTo>
+                    <a:pt x="5270054" y="395252"/>
+                  </a:lnTo>
+                  <a:lnTo>
+                    <a:pt x="5193676" y="420474"/>
+                  </a:lnTo>
+                  <a:lnTo>
+                    <a:pt x="5117298" y="445700"/>
+                  </a:lnTo>
+                  <a:lnTo>
+                    <a:pt x="5040921" y="470929"/>
+                  </a:lnTo>
+                  <a:lnTo>
+                    <a:pt x="4964543" y="496161"/>
+                  </a:lnTo>
+                  <a:lnTo>
+                    <a:pt x="4888166" y="521398"/>
+                  </a:lnTo>
+                  <a:lnTo>
+                    <a:pt x="4811788" y="546638"/>
+                  </a:lnTo>
+                  <a:lnTo>
+                    <a:pt x="4735410" y="571882"/>
+                  </a:lnTo>
+                  <a:lnTo>
+                    <a:pt x="4659033" y="597132"/>
+                  </a:lnTo>
+                  <a:lnTo>
+                    <a:pt x="4582655" y="622386"/>
+                  </a:lnTo>
+                  <a:lnTo>
+                    <a:pt x="4506278" y="647646"/>
+                  </a:lnTo>
+                  <a:lnTo>
+                    <a:pt x="4429900" y="672912"/>
+                  </a:lnTo>
+                  <a:lnTo>
+                    <a:pt x="4353522" y="698184"/>
+                  </a:lnTo>
+                  <a:lnTo>
+                    <a:pt x="4277145" y="723464"/>
+                  </a:lnTo>
+                  <a:lnTo>
+                    <a:pt x="4200767" y="748751"/>
+                  </a:lnTo>
+                  <a:lnTo>
+                    <a:pt x="4124390" y="774047"/>
+                  </a:lnTo>
+                  <a:lnTo>
+                    <a:pt x="4048012" y="799352"/>
+                  </a:lnTo>
+                  <a:lnTo>
+                    <a:pt x="3971634" y="824667"/>
+                  </a:lnTo>
+                  <a:lnTo>
+                    <a:pt x="3895257" y="849993"/>
+                  </a:lnTo>
+                  <a:lnTo>
+                    <a:pt x="3818879" y="875331"/>
+                  </a:lnTo>
+                  <a:lnTo>
+                    <a:pt x="3742502" y="900683"/>
+                  </a:lnTo>
+                  <a:lnTo>
+                    <a:pt x="3666124" y="926051"/>
+                  </a:lnTo>
+                  <a:lnTo>
+                    <a:pt x="3589746" y="951434"/>
+                  </a:lnTo>
+                  <a:lnTo>
+                    <a:pt x="3513369" y="976837"/>
+                  </a:lnTo>
+                  <a:lnTo>
+                    <a:pt x="3436991" y="1002260"/>
+                  </a:lnTo>
+                  <a:lnTo>
+                    <a:pt x="3360614" y="1027706"/>
+                  </a:lnTo>
+                  <a:lnTo>
+                    <a:pt x="3284236" y="1053178"/>
+                  </a:lnTo>
+                  <a:lnTo>
+                    <a:pt x="3207858" y="1078680"/>
+                  </a:lnTo>
+                  <a:lnTo>
+                    <a:pt x="3131481" y="1104213"/>
+                  </a:lnTo>
+                  <a:lnTo>
+                    <a:pt x="3055103" y="1129783"/>
+                  </a:lnTo>
+                  <a:lnTo>
+                    <a:pt x="2978726" y="1155395"/>
+                  </a:lnTo>
+                  <a:lnTo>
+                    <a:pt x="2902348" y="1181052"/>
+                  </a:lnTo>
+                  <a:lnTo>
+                    <a:pt x="2825971" y="1206760"/>
+                  </a:lnTo>
+                  <a:lnTo>
+                    <a:pt x="2749593" y="1232526"/>
+                  </a:lnTo>
+                  <a:lnTo>
+                    <a:pt x="2673215" y="1258356"/>
+                  </a:lnTo>
+                  <a:lnTo>
+                    <a:pt x="2596838" y="1284257"/>
+                  </a:lnTo>
+                  <a:lnTo>
+                    <a:pt x="2520460" y="1310235"/>
+                  </a:lnTo>
+                  <a:lnTo>
+                    <a:pt x="2444083" y="1336297"/>
+                  </a:lnTo>
+                  <a:lnTo>
+                    <a:pt x="2367705" y="1362450"/>
+                  </a:lnTo>
+                  <a:lnTo>
+                    <a:pt x="2291327" y="1388699"/>
+                  </a:lnTo>
+                  <a:lnTo>
+                    <a:pt x="2214950" y="1415049"/>
+                  </a:lnTo>
+                  <a:lnTo>
+                    <a:pt x="2138572" y="1441502"/>
+                  </a:lnTo>
+                  <a:lnTo>
+                    <a:pt x="2062195" y="1468059"/>
+                  </a:lnTo>
+                  <a:lnTo>
+                    <a:pt x="1985817" y="1494720"/>
+                  </a:lnTo>
+                  <a:lnTo>
+                    <a:pt x="1909439" y="1521483"/>
+                  </a:lnTo>
+                  <a:lnTo>
+                    <a:pt x="1833062" y="1548342"/>
+                  </a:lnTo>
+                  <a:lnTo>
+                    <a:pt x="1756684" y="1575294"/>
+                  </a:lnTo>
+                  <a:lnTo>
+                    <a:pt x="1680307" y="1602331"/>
+                  </a:lnTo>
+                  <a:lnTo>
+                    <a:pt x="1603929" y="1629447"/>
+                  </a:lnTo>
+                  <a:lnTo>
+                    <a:pt x="1527551" y="1656635"/>
+                  </a:lnTo>
+                  <a:lnTo>
+                    <a:pt x="1451174" y="1683888"/>
+                  </a:lnTo>
+                  <a:lnTo>
+                    <a:pt x="1374796" y="1711200"/>
+                  </a:lnTo>
+                  <a:lnTo>
+                    <a:pt x="1298419" y="1738564"/>
+                  </a:lnTo>
+                  <a:lnTo>
+                    <a:pt x="1222041" y="1765976"/>
+                  </a:lnTo>
+                  <a:lnTo>
+                    <a:pt x="1145663" y="1793429"/>
+                  </a:lnTo>
+                  <a:lnTo>
+                    <a:pt x="1069286" y="1820920"/>
+                  </a:lnTo>
+                  <a:lnTo>
+                    <a:pt x="992908" y="1848444"/>
+                  </a:lnTo>
+                  <a:lnTo>
+                    <a:pt x="916531" y="1875998"/>
+                  </a:lnTo>
+                  <a:lnTo>
+                    <a:pt x="840153" y="1903578"/>
+                  </a:lnTo>
+                  <a:lnTo>
+                    <a:pt x="763775" y="1931182"/>
+                  </a:lnTo>
+                  <a:lnTo>
+                    <a:pt x="687398" y="1958807"/>
+                  </a:lnTo>
+                  <a:lnTo>
+                    <a:pt x="611020" y="1986452"/>
+                  </a:lnTo>
+                  <a:lnTo>
+                    <a:pt x="534643" y="2014113"/>
+                  </a:lnTo>
+                  <a:lnTo>
+                    <a:pt x="458265" y="2041789"/>
+                  </a:lnTo>
+                  <a:lnTo>
+                    <a:pt x="381887" y="2069480"/>
+                  </a:lnTo>
+                  <a:lnTo>
+                    <a:pt x="305510" y="2097183"/>
+                  </a:lnTo>
+                  <a:lnTo>
+                    <a:pt x="229132" y="2124897"/>
+                  </a:lnTo>
+                  <a:lnTo>
+                    <a:pt x="152755" y="2152622"/>
+                  </a:lnTo>
+                  <a:lnTo>
+                    <a:pt x="76377" y="2180356"/>
+                  </a:lnTo>
+                  <a:lnTo>
+                    <a:pt x="0" y="2208099"/>
+                  </a:lnTo>
+                  <a:close/>
+                </a:path>
+              </a:pathLst>
+            </a:custGeom>
+            <a:solidFill>
+              <a:srgbClr val="999999">
+                <a:alpha val="14901"/>
+              </a:srgbClr>
+            </a:solidFill>
+          </p:spPr>
+          <p:txBody>
+            <a:bodyPr/>
+            <a:lstStyle/>
+            <a:p/>
+          </p:txBody>
+        </p:sp>
+        <p:sp>
+          <p:nvSpPr>
+            <p:cNvPr id="967" name="pl967"/>
+            <p:cNvSpPr/>
+            <p:nvPr/>
+          </p:nvSpPr>
+          <p:spPr>
+            <a:xfrm>
+              <a:off x="1985667" y="2659304"/>
+              <a:ext cx="6033829" cy="2124553"/>
+            </a:xfrm>
+            <a:custGeom>
+              <a:avLst/>
+              <a:pathLst>
+                <a:path w="6033829" h="2124553">
+                  <a:moveTo>
+                    <a:pt x="0" y="2124553"/>
+                  </a:moveTo>
+                  <a:lnTo>
+                    <a:pt x="76377" y="2099264"/>
+                  </a:lnTo>
+                  <a:lnTo>
+                    <a:pt x="152755" y="2073967"/>
+                  </a:lnTo>
+                  <a:lnTo>
+                    <a:pt x="229132" y="2048660"/>
+                  </a:lnTo>
+                  <a:lnTo>
+                    <a:pt x="305510" y="2023343"/>
+                  </a:lnTo>
+                  <a:lnTo>
+                    <a:pt x="381887" y="1998014"/>
+                  </a:lnTo>
+                  <a:lnTo>
+                    <a:pt x="458265" y="1972673"/>
+                  </a:lnTo>
+                  <a:lnTo>
+                    <a:pt x="534643" y="1947318"/>
+                  </a:lnTo>
+                  <a:lnTo>
+                    <a:pt x="611020" y="1921948"/>
+                  </a:lnTo>
+                  <a:lnTo>
+                    <a:pt x="687398" y="1896560"/>
+                  </a:lnTo>
+                  <a:lnTo>
+                    <a:pt x="763775" y="1871154"/>
+                  </a:lnTo>
+                  <a:lnTo>
+                    <a:pt x="840153" y="1845726"/>
+                  </a:lnTo>
+                  <a:lnTo>
+                    <a:pt x="916531" y="1820275"/>
+                  </a:lnTo>
+                  <a:lnTo>
+                    <a:pt x="992908" y="1794797"/>
+                  </a:lnTo>
+                  <a:lnTo>
+                    <a:pt x="1069286" y="1769290"/>
+                  </a:lnTo>
+                  <a:lnTo>
+                    <a:pt x="1145663" y="1743749"/>
+                  </a:lnTo>
+                  <a:lnTo>
+                    <a:pt x="1222041" y="1718171"/>
+                  </a:lnTo>
+                  <a:lnTo>
+                    <a:pt x="1298419" y="1692551"/>
+                  </a:lnTo>
+                  <a:lnTo>
+                    <a:pt x="1374796" y="1666884"/>
+                  </a:lnTo>
+                  <a:lnTo>
+                    <a:pt x="1451174" y="1641164"/>
+                  </a:lnTo>
+                  <a:lnTo>
+                    <a:pt x="1527551" y="1615386"/>
+                  </a:lnTo>
+                  <a:lnTo>
+                    <a:pt x="1603929" y="1589542"/>
+                  </a:lnTo>
+                  <a:lnTo>
+                    <a:pt x="1680307" y="1563626"/>
+                  </a:lnTo>
+                  <a:lnTo>
+                    <a:pt x="1756684" y="1537632"/>
+                  </a:lnTo>
+                  <a:lnTo>
+                    <a:pt x="1833062" y="1511552"/>
+                  </a:lnTo>
+                  <a:lnTo>
+                    <a:pt x="1909439" y="1485380"/>
+                  </a:lnTo>
+                  <a:lnTo>
+                    <a:pt x="1985817" y="1459110"/>
+                  </a:lnTo>
+                  <a:lnTo>
+                    <a:pt x="2062195" y="1432740"/>
+                  </a:lnTo>
+                  <a:lnTo>
+                    <a:pt x="2138572" y="1406266"/>
+                  </a:lnTo>
+                  <a:lnTo>
+                    <a:pt x="2214950" y="1379687"/>
+                  </a:lnTo>
+                  <a:lnTo>
+                    <a:pt x="2291327" y="1353005"/>
+                  </a:lnTo>
+                  <a:lnTo>
+                    <a:pt x="2367705" y="1326223"/>
+                  </a:lnTo>
+                  <a:lnTo>
+                    <a:pt x="2444083" y="1299344"/>
+                  </a:lnTo>
+                  <a:lnTo>
+                    <a:pt x="2520460" y="1272375"/>
+                  </a:lnTo>
+                  <a:lnTo>
+                    <a:pt x="2596838" y="1245321"/>
+                  </a:lnTo>
+                  <a:lnTo>
+                    <a:pt x="2673215" y="1218190"/>
+                  </a:lnTo>
+                  <a:lnTo>
+                    <a:pt x="2749593" y="1190989"/>
+                  </a:lnTo>
+                  <a:lnTo>
+                    <a:pt x="2825971" y="1163723"/>
+                  </a:lnTo>
+                  <a:lnTo>
+                    <a:pt x="2902348" y="1136400"/>
+                  </a:lnTo>
+                  <a:lnTo>
+                    <a:pt x="2978726" y="1109025"/>
+                  </a:lnTo>
+                  <a:lnTo>
+                    <a:pt x="3055103" y="1081605"/>
+                  </a:lnTo>
+                  <a:lnTo>
+                    <a:pt x="3131481" y="1054144"/>
+                  </a:lnTo>
+                  <a:lnTo>
+                    <a:pt x="3207858" y="1026646"/>
+                  </a:lnTo>
+                  <a:lnTo>
+                    <a:pt x="3284236" y="999115"/>
+                  </a:lnTo>
+                  <a:lnTo>
+                    <a:pt x="3360614" y="971556"/>
+                  </a:lnTo>
+                  <a:lnTo>
+                    <a:pt x="3436991" y="943970"/>
+                  </a:lnTo>
+                  <a:lnTo>
+                    <a:pt x="3513369" y="916362"/>
+                  </a:lnTo>
+                  <a:lnTo>
+                    <a:pt x="3589746" y="888733"/>
+                  </a:lnTo>
+                  <a:lnTo>
+                    <a:pt x="3666124" y="861085"/>
+                  </a:lnTo>
+                  <a:lnTo>
+                    <a:pt x="3742502" y="833421"/>
+                  </a:lnTo>
+                  <a:lnTo>
+                    <a:pt x="3818879" y="805741"/>
+                  </a:lnTo>
+                  <a:lnTo>
+                    <a:pt x="3895257" y="778048"/>
+                  </a:lnTo>
+                  <a:lnTo>
+                    <a:pt x="3971634" y="750343"/>
+                  </a:lnTo>
+                  <a:lnTo>
+                    <a:pt x="4048012" y="722626"/>
+                  </a:lnTo>
+                  <a:lnTo>
+                    <a:pt x="4124390" y="694899"/>
+                  </a:lnTo>
+                  <a:lnTo>
+                    <a:pt x="4200767" y="667163"/>
+                  </a:lnTo>
+                  <a:lnTo>
+                    <a:pt x="4277145" y="639419"/>
+                  </a:lnTo>
+                  <a:lnTo>
+                    <a:pt x="4353522" y="611667"/>
+                  </a:lnTo>
+                  <a:lnTo>
+                    <a:pt x="4429900" y="583908"/>
+                  </a:lnTo>
+                  <a:lnTo>
+                    <a:pt x="4506278" y="556142"/>
+                  </a:lnTo>
+                  <a:lnTo>
+                    <a:pt x="4582655" y="528370"/>
+                  </a:lnTo>
+                  <a:lnTo>
+                    <a:pt x="4659033" y="500593"/>
+                  </a:lnTo>
+                  <a:lnTo>
+                    <a:pt x="4735410" y="472811"/>
+                  </a:lnTo>
+                  <a:lnTo>
+                    <a:pt x="4811788" y="445024"/>
+                  </a:lnTo>
+                  <a:lnTo>
+                    <a:pt x="4888166" y="417233"/>
+                  </a:lnTo>
+                  <a:lnTo>
+                    <a:pt x="4964543" y="389437"/>
+                  </a:lnTo>
+                  <a:lnTo>
+                    <a:pt x="5040921" y="361638"/>
+                  </a:lnTo>
+                  <a:lnTo>
+                    <a:pt x="5117298" y="333836"/>
+                  </a:lnTo>
+                  <a:lnTo>
+                    <a:pt x="5193676" y="306030"/>
+                  </a:lnTo>
+                  <a:lnTo>
+                    <a:pt x="5270054" y="278221"/>
+                  </a:lnTo>
+                  <a:lnTo>
+                    <a:pt x="5346431" y="250409"/>
+                  </a:lnTo>
+                  <a:lnTo>
+                    <a:pt x="5422809" y="222594"/>
+                  </a:lnTo>
+                  <a:lnTo>
+                    <a:pt x="5499186" y="194777"/>
+                  </a:lnTo>
+                  <a:lnTo>
+                    <a:pt x="5575564" y="166958"/>
+                  </a:lnTo>
+                  <a:lnTo>
+                    <a:pt x="5651942" y="139136"/>
+                  </a:lnTo>
+                  <a:lnTo>
+                    <a:pt x="5728319" y="111313"/>
+                  </a:lnTo>
+                  <a:lnTo>
+                    <a:pt x="5804697" y="83487"/>
+                  </a:lnTo>
+                  <a:lnTo>
+                    <a:pt x="5881074" y="55660"/>
+                  </a:lnTo>
+                  <a:lnTo>
+                    <a:pt x="5957452" y="27830"/>
+                  </a:lnTo>
+                  <a:lnTo>
+                    <a:pt x="6033829" y="0"/>
+                  </a:lnTo>
+                </a:path>
+              </a:pathLst>
+            </a:custGeom>
+          </p:spPr>
+          <p:txBody>
+            <a:bodyPr/>
+            <a:lstStyle/>
+            <a:p/>
+          </p:txBody>
+        </p:sp>
+        <p:sp>
+          <p:nvSpPr>
+            <p:cNvPr id="968" name="pl968"/>
+            <p:cNvSpPr/>
+            <p:nvPr/>
+          </p:nvSpPr>
+          <p:spPr>
+            <a:xfrm>
+              <a:off x="1985667" y="2802461"/>
+              <a:ext cx="6033829" cy="2064942"/>
+            </a:xfrm>
+            <a:custGeom>
+              <a:avLst/>
+              <a:pathLst>
+                <a:path w="6033829" h="2064942">
+                  <a:moveTo>
+                    <a:pt x="6033829" y="0"/>
+                  </a:moveTo>
+                  <a:lnTo>
+                    <a:pt x="5957452" y="25200"/>
+                  </a:lnTo>
+                  <a:lnTo>
+                    <a:pt x="5881074" y="50403"/>
+                  </a:lnTo>
+                  <a:lnTo>
+                    <a:pt x="5804697" y="75607"/>
+                  </a:lnTo>
+                  <a:lnTo>
+                    <a:pt x="5728319" y="100813"/>
+                  </a:lnTo>
+                  <a:lnTo>
+                    <a:pt x="5651942" y="126021"/>
+                  </a:lnTo>
+                  <a:lnTo>
+                    <a:pt x="5575564" y="151231"/>
+                  </a:lnTo>
+                  <a:lnTo>
+                    <a:pt x="5499186" y="176443"/>
+                  </a:lnTo>
+                  <a:lnTo>
+                    <a:pt x="5422809" y="201657"/>
+                  </a:lnTo>
+                  <a:lnTo>
+                    <a:pt x="5346431" y="226875"/>
+                  </a:lnTo>
+                  <a:lnTo>
+                    <a:pt x="5270054" y="252094"/>
+                  </a:lnTo>
+                  <a:lnTo>
+                    <a:pt x="5193676" y="277317"/>
+                  </a:lnTo>
+                  <a:lnTo>
+                    <a:pt x="5117298" y="302543"/>
+                  </a:lnTo>
+                  <a:lnTo>
+                    <a:pt x="5040921" y="327772"/>
+                  </a:lnTo>
+                  <a:lnTo>
+                    <a:pt x="4964543" y="353004"/>
+                  </a:lnTo>
+                  <a:lnTo>
+                    <a:pt x="4888166" y="378240"/>
+                  </a:lnTo>
+                  <a:lnTo>
+                    <a:pt x="4811788" y="403480"/>
+                  </a:lnTo>
+                  <a:lnTo>
+                    <a:pt x="4735410" y="428725"/>
+                  </a:lnTo>
+                  <a:lnTo>
+                    <a:pt x="4659033" y="453974"/>
+                  </a:lnTo>
+                  <a:lnTo>
+                    <a:pt x="4582655" y="479229"/>
+                  </a:lnTo>
+                  <a:lnTo>
+                    <a:pt x="4506278" y="504489"/>
+                  </a:lnTo>
+                  <a:lnTo>
+                    <a:pt x="4429900" y="529755"/>
+                  </a:lnTo>
+                  <a:lnTo>
+                    <a:pt x="4353522" y="555027"/>
+                  </a:lnTo>
+                  <a:lnTo>
+                    <a:pt x="4277145" y="580307"/>
+                  </a:lnTo>
+                  <a:lnTo>
+                    <a:pt x="4200767" y="605594"/>
+                  </a:lnTo>
+                  <a:lnTo>
+                    <a:pt x="4124390" y="630889"/>
+                  </a:lnTo>
+                  <a:lnTo>
+                    <a:pt x="4048012" y="656194"/>
+                  </a:lnTo>
+                  <a:lnTo>
+                    <a:pt x="3971634" y="681509"/>
+                  </a:lnTo>
+                  <a:lnTo>
+                    <a:pt x="3895257" y="706836"/>
+                  </a:lnTo>
+                  <a:lnTo>
+                    <a:pt x="3818879" y="732174"/>
+                  </a:lnTo>
+                  <a:lnTo>
+                    <a:pt x="3742502" y="757526"/>
+                  </a:lnTo>
+                  <a:lnTo>
+                    <a:pt x="3666124" y="782893"/>
+                  </a:lnTo>
+                  <a:lnTo>
+                    <a:pt x="3589746" y="808277"/>
+                  </a:lnTo>
+                  <a:lnTo>
+                    <a:pt x="3513369" y="833679"/>
+                  </a:lnTo>
+                  <a:lnTo>
+                    <a:pt x="3436991" y="859103"/>
+                  </a:lnTo>
+                  <a:lnTo>
+                    <a:pt x="3360614" y="884549"/>
+                  </a:lnTo>
+                  <a:lnTo>
+                    <a:pt x="3284236" y="910021"/>
+                  </a:lnTo>
+                  <a:lnTo>
+                    <a:pt x="3207858" y="935522"/>
+                  </a:lnTo>
+                  <a:lnTo>
+                    <a:pt x="3131481" y="961056"/>
+                  </a:lnTo>
+                  <a:lnTo>
+                    <a:pt x="3055103" y="986626"/>
+                  </a:lnTo>
+                  <a:lnTo>
+                    <a:pt x="2978726" y="1012237"/>
+                  </a:lnTo>
+                  <a:lnTo>
+                    <a:pt x="2902348" y="1037894"/>
+                  </a:lnTo>
+                  <a:lnTo>
+                    <a:pt x="2825971" y="1063603"/>
+                  </a:lnTo>
+                  <a:lnTo>
+                    <a:pt x="2749593" y="1089369"/>
+                  </a:lnTo>
+                  <a:lnTo>
+                    <a:pt x="2673215" y="1115199"/>
+                  </a:lnTo>
+                  <a:lnTo>
+                    <a:pt x="2596838" y="1141099"/>
+                  </a:lnTo>
+                  <a:lnTo>
+                    <a:pt x="2520460" y="1167077"/>
+                  </a:lnTo>
+                  <a:lnTo>
+                    <a:pt x="2444083" y="1193140"/>
+                  </a:lnTo>
+                  <a:lnTo>
+                    <a:pt x="2367705" y="1219293"/>
+                  </a:lnTo>
+                  <a:lnTo>
+                    <a:pt x="2291327" y="1245542"/>
+                  </a:lnTo>
+                  <a:lnTo>
+                    <a:pt x="2214950" y="1271891"/>
+                  </a:lnTo>
+                  <a:lnTo>
+                    <a:pt x="2138572" y="1298344"/>
+                  </a:lnTo>
+                  <a:lnTo>
+                    <a:pt x="2062195" y="1324902"/>
+                  </a:lnTo>
+                  <a:lnTo>
+                    <a:pt x="1985817" y="1351563"/>
+                  </a:lnTo>
+                  <a:lnTo>
+                    <a:pt x="1909439" y="1378325"/>
+                  </a:lnTo>
+                  <a:lnTo>
+                    <a:pt x="1833062" y="1405185"/>
+                  </a:lnTo>
+                  <a:lnTo>
+                    <a:pt x="1756684" y="1432136"/>
+                  </a:lnTo>
+                  <a:lnTo>
+                    <a:pt x="1680307" y="1459173"/>
+                  </a:lnTo>
+                  <a:lnTo>
+                    <a:pt x="1603929" y="1486289"/>
+                  </a:lnTo>
+                  <a:lnTo>
+                    <a:pt x="1527551" y="1513477"/>
+                  </a:lnTo>
+                  <a:lnTo>
+                    <a:pt x="1451174" y="1540730"/>
+                  </a:lnTo>
+                  <a:lnTo>
+                    <a:pt x="1374796" y="1568042"/>
+                  </a:lnTo>
+                  <a:lnTo>
+                    <a:pt x="1298419" y="1595407"/>
+                  </a:lnTo>
+                  <a:lnTo>
+                    <a:pt x="1222041" y="1622818"/>
+                  </a:lnTo>
+                  <a:lnTo>
+                    <a:pt x="1145663" y="1650272"/>
+                  </a:lnTo>
+                  <a:lnTo>
+                    <a:pt x="1069286" y="1677763"/>
+                  </a:lnTo>
+                  <a:lnTo>
+                    <a:pt x="992908" y="1705287"/>
+                  </a:lnTo>
+                  <a:lnTo>
+                    <a:pt x="916531" y="1732841"/>
+                  </a:lnTo>
+                  <a:lnTo>
+                    <a:pt x="840153" y="1760421"/>
+                  </a:lnTo>
+                  <a:lnTo>
+                    <a:pt x="763775" y="1788025"/>
+                  </a:lnTo>
+                  <a:lnTo>
+                    <a:pt x="687398" y="1815650"/>
+                  </a:lnTo>
+                  <a:lnTo>
+                    <a:pt x="611020" y="1843294"/>
+                  </a:lnTo>
+                  <a:lnTo>
+                    <a:pt x="534643" y="1870955"/>
+                  </a:lnTo>
+                  <a:lnTo>
+                    <a:pt x="458265" y="1898632"/>
+                  </a:lnTo>
+                  <a:lnTo>
+                    <a:pt x="381887" y="1926323"/>
+                  </a:lnTo>
+                  <a:lnTo>
+                    <a:pt x="305510" y="1954026"/>
+                  </a:lnTo>
+                  <a:lnTo>
+                    <a:pt x="229132" y="1981740"/>
+                  </a:lnTo>
+                  <a:lnTo>
+                    <a:pt x="152755" y="2009465"/>
+                  </a:lnTo>
+                  <a:lnTo>
+                    <a:pt x="76377" y="2037199"/>
+                  </a:lnTo>
+                  <a:lnTo>
+                    <a:pt x="0" y="2064942"/>
+                  </a:lnTo>
+                </a:path>
+              </a:pathLst>
+            </a:custGeom>
+          </p:spPr>
+          <p:txBody>
+            <a:bodyPr/>
+            <a:lstStyle/>
+            <a:p/>
+          </p:txBody>
+        </p:sp>
+        <p:sp>
+          <p:nvSpPr>
+            <p:cNvPr id="969" name="pl969"/>
+            <p:cNvSpPr/>
+            <p:nvPr/>
+          </p:nvSpPr>
+          <p:spPr>
+            <a:xfrm>
+              <a:off x="1985667" y="2730883"/>
+              <a:ext cx="6033829" cy="2094747"/>
+            </a:xfrm>
+            <a:custGeom>
+              <a:avLst/>
+              <a:pathLst>
+                <a:path w="6033829" h="2094747">
+                  <a:moveTo>
+                    <a:pt x="0" y="2094747"/>
+                  </a:moveTo>
+                  <a:lnTo>
+                    <a:pt x="76377" y="2068232"/>
+                  </a:lnTo>
+                  <a:lnTo>
+                    <a:pt x="152755" y="2041716"/>
+                  </a:lnTo>
+                  <a:lnTo>
+                    <a:pt x="229132" y="2015200"/>
+                  </a:lnTo>
+                  <a:lnTo>
+                    <a:pt x="305510" y="1988684"/>
+                  </a:lnTo>
+                  <a:lnTo>
+                    <a:pt x="381887" y="1962168"/>
+                  </a:lnTo>
+                  <a:lnTo>
+                    <a:pt x="458265" y="1935653"/>
+                  </a:lnTo>
+                  <a:lnTo>
+                    <a:pt x="534643" y="1909137"/>
+                  </a:lnTo>
+                  <a:lnTo>
+                    <a:pt x="611020" y="1882621"/>
+                  </a:lnTo>
+                  <a:lnTo>
+                    <a:pt x="687398" y="1856105"/>
+                  </a:lnTo>
+                  <a:lnTo>
+                    <a:pt x="763775" y="1829589"/>
+                  </a:lnTo>
+                  <a:lnTo>
+                    <a:pt x="840153" y="1803074"/>
+                  </a:lnTo>
+                  <a:lnTo>
+                    <a:pt x="916531" y="1776558"/>
+                  </a:lnTo>
+                  <a:lnTo>
+                    <a:pt x="992908" y="1750042"/>
+                  </a:lnTo>
+                  <a:lnTo>
+                    <a:pt x="1069286" y="1723526"/>
+                  </a:lnTo>
+                  <a:lnTo>
+                    <a:pt x="1145663" y="1697010"/>
+                  </a:lnTo>
+                  <a:lnTo>
+                    <a:pt x="1222041" y="1670495"/>
+                  </a:lnTo>
+                  <a:lnTo>
+                    <a:pt x="1298419" y="1643979"/>
+                  </a:lnTo>
+                  <a:lnTo>
+                    <a:pt x="1374796" y="1617463"/>
+                  </a:lnTo>
+                  <a:lnTo>
+                    <a:pt x="1451174" y="1590947"/>
+                  </a:lnTo>
+                  <a:lnTo>
+                    <a:pt x="1527551" y="1564431"/>
+                  </a:lnTo>
+                  <a:lnTo>
+                    <a:pt x="1603929" y="1537916"/>
+                  </a:lnTo>
+                  <a:lnTo>
+                    <a:pt x="1680307" y="1511400"/>
+                  </a:lnTo>
+                  <a:lnTo>
+                    <a:pt x="1756684" y="1484884"/>
+                  </a:lnTo>
+                  <a:lnTo>
+                    <a:pt x="1833062" y="1458368"/>
+                  </a:lnTo>
+                  <a:lnTo>
+                    <a:pt x="1909439" y="1431852"/>
+                  </a:lnTo>
+                  <a:lnTo>
+                    <a:pt x="1985817" y="1405337"/>
+                  </a:lnTo>
+                  <a:lnTo>
+                    <a:pt x="2062195" y="1378821"/>
+                  </a:lnTo>
+                  <a:lnTo>
+                    <a:pt x="2138572" y="1352305"/>
+                  </a:lnTo>
+                  <a:lnTo>
+                    <a:pt x="2214950" y="1325789"/>
+                  </a:lnTo>
+                  <a:lnTo>
+                    <a:pt x="2291327" y="1299273"/>
+                  </a:lnTo>
+                  <a:lnTo>
+                    <a:pt x="2367705" y="1272758"/>
+                  </a:lnTo>
+                  <a:lnTo>
+                    <a:pt x="2444083" y="1246242"/>
+                  </a:lnTo>
+                  <a:lnTo>
+                    <a:pt x="2520460" y="1219726"/>
+                  </a:lnTo>
+                  <a:lnTo>
+                    <a:pt x="2596838" y="1193210"/>
+                  </a:lnTo>
+                  <a:lnTo>
+                    <a:pt x="2673215" y="1166695"/>
+                  </a:lnTo>
+                  <a:lnTo>
+                    <a:pt x="2749593" y="1140179"/>
+                  </a:lnTo>
+                  <a:lnTo>
+                    <a:pt x="2825971" y="1113663"/>
+                  </a:lnTo>
+                  <a:lnTo>
+                    <a:pt x="2902348" y="1087147"/>
+                  </a:lnTo>
+                  <a:lnTo>
+                    <a:pt x="2978726" y="1060631"/>
+                  </a:lnTo>
+                  <a:lnTo>
+                    <a:pt x="3055103" y="1034116"/>
+                  </a:lnTo>
+                  <a:lnTo>
+                    <a:pt x="3131481" y="1007600"/>
+                  </a:lnTo>
+                  <a:lnTo>
+                    <a:pt x="3207858" y="981084"/>
+                  </a:lnTo>
+                  <a:lnTo>
+                    <a:pt x="3284236" y="954568"/>
+                  </a:lnTo>
+                  <a:lnTo>
+                    <a:pt x="3360614" y="928052"/>
+                  </a:lnTo>
+                  <a:lnTo>
+                    <a:pt x="3436991" y="901537"/>
+                  </a:lnTo>
+                  <a:lnTo>
+                    <a:pt x="3513369" y="875021"/>
+                  </a:lnTo>
+                  <a:lnTo>
+                    <a:pt x="3589746" y="848505"/>
+                  </a:lnTo>
+                  <a:lnTo>
+                    <a:pt x="3666124" y="821989"/>
+                  </a:lnTo>
+                  <a:lnTo>
+                    <a:pt x="3742502" y="795473"/>
+                  </a:lnTo>
+                  <a:lnTo>
+                    <a:pt x="3818879" y="768958"/>
+                  </a:lnTo>
+                  <a:lnTo>
+                    <a:pt x="3895257" y="742442"/>
+                  </a:lnTo>
+                  <a:lnTo>
+                    <a:pt x="3971634" y="715926"/>
+                  </a:lnTo>
+                  <a:lnTo>
+                    <a:pt x="4048012" y="689410"/>
+                  </a:lnTo>
+                  <a:lnTo>
+                    <a:pt x="4124390" y="662894"/>
+                  </a:lnTo>
+                  <a:lnTo>
+                    <a:pt x="4200767" y="636379"/>
+                  </a:lnTo>
+                  <a:lnTo>
+                    <a:pt x="4277145" y="609863"/>
+                  </a:lnTo>
+                  <a:lnTo>
+                    <a:pt x="4353522" y="583347"/>
+                  </a:lnTo>
+                  <a:lnTo>
+                    <a:pt x="4429900" y="556831"/>
+                  </a:lnTo>
+                  <a:lnTo>
+                    <a:pt x="4506278" y="530315"/>
+                  </a:lnTo>
+                  <a:lnTo>
+                    <a:pt x="4582655" y="503800"/>
+                  </a:lnTo>
+                  <a:lnTo>
+                    <a:pt x="4659033" y="477284"/>
+                  </a:lnTo>
+                  <a:lnTo>
+                    <a:pt x="4735410" y="450768"/>
+                  </a:lnTo>
+                  <a:lnTo>
+                    <a:pt x="4811788" y="424252"/>
+                  </a:lnTo>
+                  <a:lnTo>
+                    <a:pt x="4888166" y="397736"/>
+                  </a:lnTo>
+                  <a:lnTo>
+                    <a:pt x="4964543" y="371221"/>
+                  </a:lnTo>
+                  <a:lnTo>
+                    <a:pt x="5040921" y="344705"/>
+                  </a:lnTo>
+                  <a:lnTo>
+                    <a:pt x="5117298" y="318189"/>
+                  </a:lnTo>
+                  <a:lnTo>
+                    <a:pt x="5193676" y="291673"/>
+                  </a:lnTo>
+                  <a:lnTo>
+                    <a:pt x="5270054" y="265157"/>
+                  </a:lnTo>
+                  <a:lnTo>
+                    <a:pt x="5346431" y="238642"/>
+                  </a:lnTo>
+                  <a:lnTo>
+                    <a:pt x="5422809" y="212126"/>
+                  </a:lnTo>
+                  <a:lnTo>
+                    <a:pt x="5499186" y="185610"/>
+                  </a:lnTo>
+                  <a:lnTo>
+                    <a:pt x="5575564" y="159094"/>
+                  </a:lnTo>
+                  <a:lnTo>
+                    <a:pt x="5651942" y="132578"/>
+                  </a:lnTo>
+                  <a:lnTo>
+                    <a:pt x="5728319" y="106063"/>
+                  </a:lnTo>
+                  <a:lnTo>
+                    <a:pt x="5804697" y="79547"/>
+                  </a:lnTo>
+                  <a:lnTo>
+                    <a:pt x="5881074" y="53031"/>
+                  </a:lnTo>
+                  <a:lnTo>
+                    <a:pt x="5957452" y="26515"/>
+                  </a:lnTo>
+                  <a:lnTo>
+                    <a:pt x="6033829" y="0"/>
+                  </a:lnTo>
+                </a:path>
+              </a:pathLst>
+            </a:custGeom>
+            <a:ln w="27101" cap="flat">
+              <a:solidFill>
+                <a:srgbClr val="999999">
+                  <a:alpha val="100000"/>
+                </a:srgbClr>
+              </a:solidFill>
+              <a:prstDash val="solid"/>
+              <a:round/>
+            </a:ln>
+          </p:spPr>
+          <p:txBody>
+            <a:bodyPr/>
+            <a:lstStyle/>
+            <a:p/>
+          </p:txBody>
+        </p:sp>
+        <p:sp>
+          <p:nvSpPr>
+            <p:cNvPr id="970" name="pg970"/>
+            <p:cNvSpPr/>
+            <p:nvPr/>
+          </p:nvSpPr>
+          <p:spPr>
+            <a:xfrm>
+              <a:off x="2425754" y="2928084"/>
+              <a:ext cx="6191456" cy="1817128"/>
+            </a:xfrm>
+            <a:custGeom>
+              <a:avLst/>
+              <a:pathLst>
+                <a:path w="6191456" h="1817128">
+                  <a:moveTo>
+                    <a:pt x="0" y="1669429"/>
+                  </a:moveTo>
+                  <a:lnTo>
+                    <a:pt x="157354" y="1630708"/>
+                  </a:lnTo>
+                  <a:lnTo>
+                    <a:pt x="314709" y="1591943"/>
+                  </a:lnTo>
+                  <a:lnTo>
+                    <a:pt x="472064" y="1553128"/>
+                  </a:lnTo>
+                  <a:lnTo>
+                    <a:pt x="629419" y="1514254"/>
+                  </a:lnTo>
+                  <a:lnTo>
+                    <a:pt x="786774" y="1475312"/>
+                  </a:lnTo>
+                  <a:lnTo>
+                    <a:pt x="944129" y="1436290"/>
+                  </a:lnTo>
+                  <a:lnTo>
+                    <a:pt x="1101484" y="1397174"/>
+                  </a:lnTo>
+                  <a:lnTo>
+                    <a:pt x="1258839" y="1357946"/>
+                  </a:lnTo>
+                  <a:lnTo>
+                    <a:pt x="1416194" y="1318587"/>
+                  </a:lnTo>
+                  <a:lnTo>
+                    <a:pt x="1573548" y="1279072"/>
+                  </a:lnTo>
+                  <a:lnTo>
+                    <a:pt x="1730903" y="1239372"/>
+                  </a:lnTo>
+                  <a:lnTo>
+                    <a:pt x="1888258" y="1199452"/>
+                  </a:lnTo>
+                  <a:lnTo>
+                    <a:pt x="2045613" y="1159275"/>
+                  </a:lnTo>
+                  <a:lnTo>
+                    <a:pt x="2202968" y="1118801"/>
+                  </a:lnTo>
+                  <a:lnTo>
+                    <a:pt x="2360323" y="1077987"/>
+                  </a:lnTo>
+                  <a:lnTo>
+                    <a:pt x="2517678" y="1036795"/>
+                  </a:lnTo>
+                  <a:lnTo>
+                    <a:pt x="2675033" y="995195"/>
+                  </a:lnTo>
+                  <a:lnTo>
+                    <a:pt x="2832388" y="953171"/>
+                  </a:lnTo>
+                  <a:lnTo>
+                    <a:pt x="2989743" y="910719"/>
+                  </a:lnTo>
+                  <a:lnTo>
+                    <a:pt x="3147097" y="867856"/>
+                  </a:lnTo>
+                  <a:lnTo>
+                    <a:pt x="3304452" y="824608"/>
+                  </a:lnTo>
+                  <a:lnTo>
+                    <a:pt x="3461807" y="781013"/>
+                  </a:lnTo>
+                  <a:lnTo>
+                    <a:pt x="3619162" y="737112"/>
+                  </a:lnTo>
+                  <a:lnTo>
+                    <a:pt x="3776517" y="692946"/>
+                  </a:lnTo>
+                  <a:lnTo>
+                    <a:pt x="3933872" y="648554"/>
+                  </a:lnTo>
+                  <a:lnTo>
+                    <a:pt x="4091227" y="603970"/>
+                  </a:lnTo>
+                  <a:lnTo>
+                    <a:pt x="4248582" y="559225"/>
+                  </a:lnTo>
+                  <a:lnTo>
+                    <a:pt x="4405937" y="514344"/>
+                  </a:lnTo>
+                  <a:lnTo>
+                    <a:pt x="4563291" y="469348"/>
+                  </a:lnTo>
+                  <a:lnTo>
+                    <a:pt x="4720646" y="424255"/>
+                  </a:lnTo>
+                  <a:lnTo>
+                    <a:pt x="4878001" y="379080"/>
+                  </a:lnTo>
+                  <a:lnTo>
+                    <a:pt x="5035356" y="333834"/>
+                  </a:lnTo>
+                  <a:lnTo>
+                    <a:pt x="5192711" y="288528"/>
+                  </a:lnTo>
+                  <a:lnTo>
+                    <a:pt x="5350066" y="243170"/>
+                  </a:lnTo>
+                  <a:lnTo>
+                    <a:pt x="5507421" y="197767"/>
+                  </a:lnTo>
+                  <a:lnTo>
+                    <a:pt x="5664776" y="152325"/>
+                  </a:lnTo>
+                  <a:lnTo>
+                    <a:pt x="5822131" y="106849"/>
+                  </a:lnTo>
+                  <a:lnTo>
+                    <a:pt x="5979486" y="61343"/>
+                  </a:lnTo>
+                  <a:lnTo>
+                    <a:pt x="6136840" y="15811"/>
+                  </a:lnTo>
+                  <a:lnTo>
+                    <a:pt x="6191456" y="0"/>
+                  </a:lnTo>
+                  <a:lnTo>
+                    <a:pt x="6191456" y="176204"/>
+                  </a:lnTo>
+                  <a:lnTo>
+                    <a:pt x="6136840" y="189594"/>
+                  </a:lnTo>
+                  <a:lnTo>
+                    <a:pt x="5979486" y="228194"/>
+                  </a:lnTo>
+                  <a:lnTo>
+                    <a:pt x="5822131" y="266820"/>
+                  </a:lnTo>
+                  <a:lnTo>
+                    <a:pt x="5664776" y="305476"/>
+                  </a:lnTo>
+                  <a:lnTo>
+                    <a:pt x="5507421" y="344166"/>
+                  </a:lnTo>
+                  <a:lnTo>
+                    <a:pt x="5350066" y="382896"/>
+                  </a:lnTo>
+                  <a:lnTo>
+                    <a:pt x="5192711" y="421670"/>
+                  </a:lnTo>
+                  <a:lnTo>
+                    <a:pt x="5035356" y="460496"/>
+                  </a:lnTo>
+                  <a:lnTo>
+                    <a:pt x="4878001" y="499382"/>
+                  </a:lnTo>
+                  <a:lnTo>
+                    <a:pt x="4720646" y="538339"/>
+                  </a:lnTo>
+                  <a:lnTo>
+                    <a:pt x="4563291" y="577378"/>
+                  </a:lnTo>
+                  <a:lnTo>
+                    <a:pt x="4405937" y="616514"/>
+                  </a:lnTo>
+                  <a:lnTo>
+                    <a:pt x="4248582" y="655765"/>
+                  </a:lnTo>
+                  <a:lnTo>
+                    <a:pt x="4091227" y="695152"/>
+                  </a:lnTo>
+                  <a:lnTo>
+                    <a:pt x="3933872" y="734701"/>
+                  </a:lnTo>
+                  <a:lnTo>
+                    <a:pt x="3776517" y="774441"/>
+                  </a:lnTo>
+                  <a:lnTo>
+                    <a:pt x="3619162" y="814407"/>
+                  </a:lnTo>
+                  <a:lnTo>
+                    <a:pt x="3461807" y="854638"/>
+                  </a:lnTo>
+                  <a:lnTo>
+                    <a:pt x="3304452" y="895175"/>
+                  </a:lnTo>
+                  <a:lnTo>
+                    <a:pt x="3147097" y="936059"/>
+                  </a:lnTo>
+                  <a:lnTo>
+                    <a:pt x="2989743" y="977328"/>
+                  </a:lnTo>
+                  <a:lnTo>
+                    <a:pt x="2832388" y="1019009"/>
+                  </a:lnTo>
+                  <a:lnTo>
+                    <a:pt x="2675033" y="1061116"/>
+                  </a:lnTo>
+                  <a:lnTo>
+                    <a:pt x="2517678" y="1103649"/>
+                  </a:lnTo>
+                  <a:lnTo>
+                    <a:pt x="2360323" y="1146589"/>
+                  </a:lnTo>
+                  <a:lnTo>
+                    <a:pt x="2202968" y="1189907"/>
+                  </a:lnTo>
+                  <a:lnTo>
+                    <a:pt x="2045613" y="1233564"/>
+                  </a:lnTo>
+                  <a:lnTo>
+                    <a:pt x="1888258" y="1277520"/>
+                  </a:lnTo>
+                  <a:lnTo>
+                    <a:pt x="1730903" y="1321732"/>
+                  </a:lnTo>
+                  <a:lnTo>
+                    <a:pt x="1573548" y="1366164"/>
+                  </a:lnTo>
+                  <a:lnTo>
+                    <a:pt x="1416194" y="1410781"/>
+                  </a:lnTo>
+                  <a:lnTo>
+                    <a:pt x="1258839" y="1455554"/>
+                  </a:lnTo>
+                  <a:lnTo>
+                    <a:pt x="1101484" y="1500459"/>
+                  </a:lnTo>
+                  <a:lnTo>
+                    <a:pt x="944129" y="1545475"/>
+                  </a:lnTo>
+                  <a:lnTo>
+                    <a:pt x="786774" y="1590585"/>
+                  </a:lnTo>
+                  <a:lnTo>
+                    <a:pt x="629419" y="1635775"/>
+                  </a:lnTo>
+                  <a:lnTo>
+                    <a:pt x="472064" y="1681033"/>
+                  </a:lnTo>
+                  <a:lnTo>
+                    <a:pt x="314709" y="1726350"/>
+                  </a:lnTo>
+                  <a:lnTo>
+                    <a:pt x="157354" y="1771717"/>
+                  </a:lnTo>
+                  <a:lnTo>
+                    <a:pt x="0" y="1817128"/>
+                  </a:lnTo>
+                  <a:close/>
+                </a:path>
+              </a:pathLst>
+            </a:custGeom>
+            <a:solidFill>
+              <a:srgbClr val="E31A1C">
+                <a:alpha val="14901"/>
+              </a:srgbClr>
+            </a:solidFill>
+          </p:spPr>
+          <p:txBody>
+            <a:bodyPr/>
+            <a:lstStyle/>
+            <a:p/>
+          </p:txBody>
+        </p:sp>
+        <p:sp>
+          <p:nvSpPr>
+            <p:cNvPr id="971" name="pl971"/>
+            <p:cNvSpPr/>
+            <p:nvPr/>
+          </p:nvSpPr>
+          <p:spPr>
+            <a:xfrm>
+              <a:off x="2425754" y="2928084"/>
+              <a:ext cx="6191456" cy="1669429"/>
+            </a:xfrm>
+            <a:custGeom>
+              <a:avLst/>
+              <a:pathLst>
+                <a:path w="6191456" h="1669429">
+                  <a:moveTo>
+                    <a:pt x="0" y="1669429"/>
+                  </a:moveTo>
+                  <a:lnTo>
+                    <a:pt x="157354" y="1630708"/>
+                  </a:lnTo>
+                  <a:lnTo>
+                    <a:pt x="314709" y="1591943"/>
+                  </a:lnTo>
+                  <a:lnTo>
+                    <a:pt x="472064" y="1553128"/>
+                  </a:lnTo>
+                  <a:lnTo>
+                    <a:pt x="629419" y="1514254"/>
+                  </a:lnTo>
+                  <a:lnTo>
+                    <a:pt x="786774" y="1475312"/>
+                  </a:lnTo>
+                  <a:lnTo>
+                    <a:pt x="944129" y="1436290"/>
+                  </a:lnTo>
+                  <a:lnTo>
+                    <a:pt x="1101484" y="1397174"/>
+                  </a:lnTo>
+                  <a:lnTo>
+                    <a:pt x="1258839" y="1357946"/>
+                  </a:lnTo>
+                  <a:lnTo>
+                    <a:pt x="1416194" y="1318587"/>
+                  </a:lnTo>
+                  <a:lnTo>
+                    <a:pt x="1573548" y="1279072"/>
+                  </a:lnTo>
+                  <a:lnTo>
+                    <a:pt x="1730903" y="1239372"/>
+                  </a:lnTo>
+                  <a:lnTo>
+                    <a:pt x="1888258" y="1199452"/>
+                  </a:lnTo>
+                  <a:lnTo>
+                    <a:pt x="2045613" y="1159275"/>
+                  </a:lnTo>
+                  <a:lnTo>
+                    <a:pt x="2202968" y="1118801"/>
+                  </a:lnTo>
+                  <a:lnTo>
+                    <a:pt x="2360323" y="1077987"/>
+                  </a:lnTo>
+                  <a:lnTo>
+                    <a:pt x="2517678" y="1036795"/>
+                  </a:lnTo>
+                  <a:lnTo>
+                    <a:pt x="2675033" y="995195"/>
+                  </a:lnTo>
+                  <a:lnTo>
+                    <a:pt x="2832388" y="953171"/>
+                  </a:lnTo>
+                  <a:lnTo>
+                    <a:pt x="2989743" y="910719"/>
+                  </a:lnTo>
+                  <a:lnTo>
+                    <a:pt x="3147097" y="867856"/>
+                  </a:lnTo>
+                  <a:lnTo>
+                    <a:pt x="3304452" y="824608"/>
+                  </a:lnTo>
+                  <a:lnTo>
+                    <a:pt x="3461807" y="781013"/>
+                  </a:lnTo>
+                  <a:lnTo>
+                    <a:pt x="3619162" y="737112"/>
+                  </a:lnTo>
+                  <a:lnTo>
+                    <a:pt x="3776517" y="692946"/>
+                  </a:lnTo>
+                  <a:lnTo>
+                    <a:pt x="3933872" y="648554"/>
+                  </a:lnTo>
+                  <a:lnTo>
+                    <a:pt x="4091227" y="603970"/>
+                  </a:lnTo>
+                  <a:lnTo>
+                    <a:pt x="4248582" y="559225"/>
+                  </a:lnTo>
+                  <a:lnTo>
+                    <a:pt x="4405937" y="514344"/>
+                  </a:lnTo>
+                  <a:lnTo>
+                    <a:pt x="4563291" y="469348"/>
+                  </a:lnTo>
+                  <a:lnTo>
+                    <a:pt x="4720646" y="424255"/>
+                  </a:lnTo>
+                  <a:lnTo>
+                    <a:pt x="4878001" y="379080"/>
+                  </a:lnTo>
+                  <a:lnTo>
+                    <a:pt x="5035356" y="333834"/>
+                  </a:lnTo>
+                  <a:lnTo>
+                    <a:pt x="5192711" y="288528"/>
+                  </a:lnTo>
+                  <a:lnTo>
+                    <a:pt x="5350066" y="243170"/>
+                  </a:lnTo>
+                  <a:lnTo>
+                    <a:pt x="5507421" y="197767"/>
+                  </a:lnTo>
+                  <a:lnTo>
+                    <a:pt x="5664776" y="152325"/>
+                  </a:lnTo>
+                  <a:lnTo>
+                    <a:pt x="5822131" y="106849"/>
+                  </a:lnTo>
+                  <a:lnTo>
+                    <a:pt x="5979486" y="61343"/>
+                  </a:lnTo>
+                  <a:lnTo>
+                    <a:pt x="6136840" y="15811"/>
+                  </a:lnTo>
+                  <a:lnTo>
+                    <a:pt x="6191456" y="0"/>
+                  </a:lnTo>
+                </a:path>
+              </a:pathLst>
+            </a:custGeom>
+          </p:spPr>
+          <p:txBody>
+            <a:bodyPr/>
+            <a:lstStyle/>
+            <a:p/>
+          </p:txBody>
+        </p:sp>
+        <p:sp>
+          <p:nvSpPr>
+            <p:cNvPr id="972" name="pl972"/>
+            <p:cNvSpPr/>
+            <p:nvPr/>
+          </p:nvSpPr>
+          <p:spPr>
+            <a:xfrm>
+              <a:off x="2425754" y="3104288"/>
+              <a:ext cx="6191456" cy="1640923"/>
+            </a:xfrm>
+            <a:custGeom>
+              <a:avLst/>
+              <a:pathLst>
+                <a:path w="6191456" h="1640923">
+                  <a:moveTo>
+                    <a:pt x="6191456" y="0"/>
+                  </a:moveTo>
+                  <a:lnTo>
+                    <a:pt x="6136840" y="13389"/>
+                  </a:lnTo>
+                  <a:lnTo>
+                    <a:pt x="5979486" y="51989"/>
+                  </a:lnTo>
+                  <a:lnTo>
+                    <a:pt x="5822131" y="90615"/>
+                  </a:lnTo>
+                  <a:lnTo>
+                    <a:pt x="5664776" y="129271"/>
+                  </a:lnTo>
+                  <a:lnTo>
+                    <a:pt x="5507421" y="167961"/>
+                  </a:lnTo>
+                  <a:lnTo>
+                    <a:pt x="5350066" y="206691"/>
+                  </a:lnTo>
+                  <a:lnTo>
+                    <a:pt x="5192711" y="245465"/>
+                  </a:lnTo>
+                  <a:lnTo>
+                    <a:pt x="5035356" y="284291"/>
+                  </a:lnTo>
+                  <a:lnTo>
+                    <a:pt x="4878001" y="323177"/>
+                  </a:lnTo>
+                  <a:lnTo>
+                    <a:pt x="4720646" y="362134"/>
+                  </a:lnTo>
+                  <a:lnTo>
+                    <a:pt x="4563291" y="401173"/>
+                  </a:lnTo>
+                  <a:lnTo>
+                    <a:pt x="4405937" y="440309"/>
+                  </a:lnTo>
+                  <a:lnTo>
+                    <a:pt x="4248582" y="479560"/>
+                  </a:lnTo>
+                  <a:lnTo>
+                    <a:pt x="4091227" y="518947"/>
+                  </a:lnTo>
+                  <a:lnTo>
+                    <a:pt x="3933872" y="558496"/>
+                  </a:lnTo>
+                  <a:lnTo>
+                    <a:pt x="3776517" y="598236"/>
+                  </a:lnTo>
+                  <a:lnTo>
+                    <a:pt x="3619162" y="638202"/>
+                  </a:lnTo>
+                  <a:lnTo>
+                    <a:pt x="3461807" y="678433"/>
+                  </a:lnTo>
+                  <a:lnTo>
+                    <a:pt x="3304452" y="718970"/>
+                  </a:lnTo>
+                  <a:lnTo>
+                    <a:pt x="3147097" y="759854"/>
+                  </a:lnTo>
+                  <a:lnTo>
+                    <a:pt x="2989743" y="801123"/>
+                  </a:lnTo>
+                  <a:lnTo>
+                    <a:pt x="2832388" y="842804"/>
+                  </a:lnTo>
+                  <a:lnTo>
+                    <a:pt x="2675033" y="884911"/>
+                  </a:lnTo>
+                  <a:lnTo>
+                    <a:pt x="2517678" y="927444"/>
+                  </a:lnTo>
+                  <a:lnTo>
+                    <a:pt x="2360323" y="970384"/>
+                  </a:lnTo>
+                  <a:lnTo>
+                    <a:pt x="2202968" y="1013702"/>
+                  </a:lnTo>
+                  <a:lnTo>
+                    <a:pt x="2045613" y="1057359"/>
+                  </a:lnTo>
+                  <a:lnTo>
+                    <a:pt x="1888258" y="1101315"/>
+                  </a:lnTo>
+                  <a:lnTo>
+                    <a:pt x="1730903" y="1145527"/>
+                  </a:lnTo>
+                  <a:lnTo>
+                    <a:pt x="1573548" y="1189959"/>
+                  </a:lnTo>
+                  <a:lnTo>
+                    <a:pt x="1416194" y="1234576"/>
+                  </a:lnTo>
+                  <a:lnTo>
+                    <a:pt x="1258839" y="1279349"/>
+                  </a:lnTo>
+                  <a:lnTo>
+                    <a:pt x="1101484" y="1324254"/>
+                  </a:lnTo>
+                  <a:lnTo>
+                    <a:pt x="944129" y="1369270"/>
+                  </a:lnTo>
+                  <a:lnTo>
+                    <a:pt x="786774" y="1414380"/>
+                  </a:lnTo>
+                  <a:lnTo>
+                    <a:pt x="629419" y="1459570"/>
+                  </a:lnTo>
+                  <a:lnTo>
+                    <a:pt x="472064" y="1504828"/>
+                  </a:lnTo>
+                  <a:lnTo>
+                    <a:pt x="314709" y="1550145"/>
+                  </a:lnTo>
+                  <a:lnTo>
+                    <a:pt x="157354" y="1595512"/>
+                  </a:lnTo>
+                  <a:lnTo>
+                    <a:pt x="0" y="1640923"/>
+                  </a:lnTo>
+                </a:path>
+              </a:pathLst>
+            </a:custGeom>
+          </p:spPr>
+          <p:txBody>
+            <a:bodyPr/>
+            <a:lstStyle/>
+            <a:p/>
+          </p:txBody>
+        </p:sp>
+        <p:sp>
+          <p:nvSpPr>
+            <p:cNvPr id="973" name="pl973"/>
+            <p:cNvSpPr/>
+            <p:nvPr/>
+          </p:nvSpPr>
+          <p:spPr>
+            <a:xfrm>
+              <a:off x="2425754" y="3016186"/>
+              <a:ext cx="6191456" cy="1655176"/>
+            </a:xfrm>
+            <a:custGeom>
+              <a:avLst/>
+              <a:pathLst>
+                <a:path w="6191456" h="1655176">
+                  <a:moveTo>
+                    <a:pt x="0" y="1655176"/>
+                  </a:moveTo>
+                  <a:lnTo>
+                    <a:pt x="157354" y="1613110"/>
+                  </a:lnTo>
+                  <a:lnTo>
+                    <a:pt x="314709" y="1571044"/>
+                  </a:lnTo>
+                  <a:lnTo>
+                    <a:pt x="472064" y="1528978"/>
+                  </a:lnTo>
+                  <a:lnTo>
+                    <a:pt x="629419" y="1486912"/>
+                  </a:lnTo>
+                  <a:lnTo>
+                    <a:pt x="786774" y="1444846"/>
+                  </a:lnTo>
+                  <a:lnTo>
+                    <a:pt x="944129" y="1402780"/>
+                  </a:lnTo>
+                  <a:lnTo>
+                    <a:pt x="1101484" y="1360714"/>
+                  </a:lnTo>
+                  <a:lnTo>
+                    <a:pt x="1258839" y="1318648"/>
+                  </a:lnTo>
+                  <a:lnTo>
+                    <a:pt x="1416194" y="1276582"/>
+                  </a:lnTo>
+                  <a:lnTo>
+                    <a:pt x="1573548" y="1234515"/>
+                  </a:lnTo>
+                  <a:lnTo>
+                    <a:pt x="1730903" y="1192449"/>
+                  </a:lnTo>
+                  <a:lnTo>
+                    <a:pt x="1888258" y="1150383"/>
+                  </a:lnTo>
+                  <a:lnTo>
+                    <a:pt x="2045613" y="1108317"/>
+                  </a:lnTo>
+                  <a:lnTo>
+                    <a:pt x="2202968" y="1066251"/>
+                  </a:lnTo>
+                  <a:lnTo>
+                    <a:pt x="2360323" y="1024185"/>
+                  </a:lnTo>
+                  <a:lnTo>
+                    <a:pt x="2517678" y="982119"/>
+                  </a:lnTo>
+                  <a:lnTo>
+                    <a:pt x="2675033" y="940053"/>
+                  </a:lnTo>
+                  <a:lnTo>
+                    <a:pt x="2832388" y="897987"/>
+                  </a:lnTo>
+                  <a:lnTo>
+                    <a:pt x="2989743" y="855921"/>
+                  </a:lnTo>
+                  <a:lnTo>
+                    <a:pt x="3147097" y="813855"/>
+                  </a:lnTo>
+                  <a:lnTo>
+                    <a:pt x="3304452" y="771789"/>
+                  </a:lnTo>
+                  <a:lnTo>
+                    <a:pt x="3461807" y="729723"/>
+                  </a:lnTo>
+                  <a:lnTo>
+                    <a:pt x="3619162" y="687657"/>
+                  </a:lnTo>
+                  <a:lnTo>
+                    <a:pt x="3776517" y="645591"/>
+                  </a:lnTo>
+                  <a:lnTo>
+                    <a:pt x="3933872" y="603525"/>
+                  </a:lnTo>
+                  <a:lnTo>
+                    <a:pt x="4091227" y="561459"/>
+                  </a:lnTo>
+                  <a:lnTo>
+                    <a:pt x="4248582" y="519393"/>
+                  </a:lnTo>
+                  <a:lnTo>
+                    <a:pt x="4405937" y="477327"/>
+                  </a:lnTo>
+                  <a:lnTo>
+                    <a:pt x="4563291" y="435260"/>
+                  </a:lnTo>
+                  <a:lnTo>
+                    <a:pt x="4720646" y="393194"/>
+                  </a:lnTo>
+                  <a:lnTo>
+                    <a:pt x="4878001" y="351128"/>
+                  </a:lnTo>
+                  <a:lnTo>
+                    <a:pt x="5035356" y="309062"/>
+                  </a:lnTo>
+                  <a:lnTo>
+                    <a:pt x="5192711" y="266996"/>
+                  </a:lnTo>
+                  <a:lnTo>
+                    <a:pt x="5350066" y="224930"/>
+                  </a:lnTo>
+                  <a:lnTo>
+                    <a:pt x="5507421" y="182864"/>
+                  </a:lnTo>
+                  <a:lnTo>
+                    <a:pt x="5664776" y="140798"/>
+                  </a:lnTo>
+                  <a:lnTo>
+                    <a:pt x="5822131" y="98732"/>
+                  </a:lnTo>
+                  <a:lnTo>
+                    <a:pt x="5979486" y="56666"/>
+                  </a:lnTo>
+                  <a:lnTo>
+                    <a:pt x="6136840" y="14600"/>
+                  </a:lnTo>
+                  <a:lnTo>
+                    <a:pt x="6191456" y="0"/>
+                  </a:lnTo>
+                </a:path>
+              </a:pathLst>
+            </a:custGeom>
+            <a:ln w="27101" cap="flat">
+              <a:solidFill>
+                <a:srgbClr val="E31A1C">
+                  <a:alpha val="100000"/>
+                </a:srgbClr>
+              </a:solidFill>
+              <a:prstDash val="solid"/>
+              <a:round/>
+            </a:ln>
+          </p:spPr>
+          <p:txBody>
+            <a:bodyPr/>
+            <a:lstStyle/>
+            <a:p/>
+          </p:txBody>
+        </p:sp>
+        <p:sp>
+          <p:nvSpPr>
+            <p:cNvPr id="974" name="tx974"/>
             <p:cNvSpPr/>
             <p:nvPr/>
           </p:nvSpPr>
@@ -36130,7 +38175,7 @@
         </p:sp>
         <p:sp>
           <p:nvSpPr>
-            <p:cNvPr id="967" name="tx967"/>
+            <p:cNvPr id="975" name="tx975"/>
             <p:cNvSpPr/>
             <p:nvPr/>
           </p:nvSpPr>
@@ -36176,7 +38221,7 @@
         </p:sp>
         <p:sp>
           <p:nvSpPr>
-            <p:cNvPr id="968" name="tx968"/>
+            <p:cNvPr id="976" name="tx976"/>
             <p:cNvSpPr/>
             <p:nvPr/>
           </p:nvSpPr>
@@ -36222,7 +38267,7 @@
         </p:sp>
         <p:sp>
           <p:nvSpPr>
-            <p:cNvPr id="969" name="tx969"/>
+            <p:cNvPr id="977" name="tx977"/>
             <p:cNvSpPr/>
             <p:nvPr/>
           </p:nvSpPr>
@@ -36268,7 +38313,7 @@
         </p:sp>
         <p:sp>
           <p:nvSpPr>
-            <p:cNvPr id="970" name="tx970"/>
+            <p:cNvPr id="978" name="tx978"/>
             <p:cNvSpPr/>
             <p:nvPr/>
           </p:nvSpPr>
@@ -36314,7 +38359,7 @@
         </p:sp>
         <p:sp>
           <p:nvSpPr>
-            <p:cNvPr id="971" name="tx971"/>
+            <p:cNvPr id="979" name="tx979"/>
             <p:cNvSpPr/>
             <p:nvPr/>
           </p:nvSpPr>
@@ -36360,7 +38405,7 @@
         </p:sp>
         <p:sp>
           <p:nvSpPr>
-            <p:cNvPr id="972" name="tx972"/>
+            <p:cNvPr id="980" name="tx980"/>
             <p:cNvSpPr/>
             <p:nvPr/>
           </p:nvSpPr>
@@ -36406,7 +38451,7 @@
         </p:sp>
         <p:sp>
           <p:nvSpPr>
-            <p:cNvPr id="973" name="tx973"/>
+            <p:cNvPr id="981" name="tx981"/>
             <p:cNvSpPr/>
             <p:nvPr/>
           </p:nvSpPr>
@@ -36452,7 +38497,7 @@
         </p:sp>
         <p:sp>
           <p:nvSpPr>
-            <p:cNvPr id="974" name="tx974"/>
+            <p:cNvPr id="982" name="tx982"/>
             <p:cNvSpPr/>
             <p:nvPr/>
           </p:nvSpPr>
@@ -36498,7 +38543,7 @@
         </p:sp>
         <p:sp>
           <p:nvSpPr>
-            <p:cNvPr id="975" name="tx975"/>
+            <p:cNvPr id="983" name="tx983"/>
             <p:cNvSpPr/>
             <p:nvPr/>
           </p:nvSpPr>
@@ -36544,7 +38589,7 @@
         </p:sp>
         <p:sp>
           <p:nvSpPr>
-            <p:cNvPr id="976" name="tx976"/>
+            <p:cNvPr id="984" name="tx984"/>
             <p:cNvSpPr/>
             <p:nvPr/>
           </p:nvSpPr>
@@ -36590,7 +38635,7 @@
         </p:sp>
         <p:sp>
           <p:nvSpPr>
-            <p:cNvPr id="977" name="tx977"/>
+            <p:cNvPr id="985" name="tx985"/>
             <p:cNvSpPr/>
             <p:nvPr/>
           </p:nvSpPr>
@@ -36636,7 +38681,7 @@
         </p:sp>
         <p:sp>
           <p:nvSpPr>
-            <p:cNvPr id="978" name="tx978"/>
+            <p:cNvPr id="986" name="tx986"/>
             <p:cNvSpPr/>
             <p:nvPr/>
           </p:nvSpPr>
